--- a/Images/waste_classification_thumbnail.pptx
+++ b/Images/waste_classification_thumbnail.pptx
@@ -3783,9 +3783,7 @@
             <a:avLst/>
           </a:prstGeom>
           <a:solidFill>
-            <a:srgbClr val="FFFFFF">
-              <a:alpha val="0"/>
-            </a:srgbClr>
+            <a:srgbClr val="FFFFFF"/>
           </a:solidFill>
           <a:ln>
             <a:noFill/>
